--- a/Johannes/mid_present.pptx
+++ b/Johannes/mid_present.pptx
@@ -8744,6 +8744,36 @@
           <a:chExt cx="0" cy="0"/>
         </a:xfrm>
       </p:grpSpPr>
+      <p:pic>
+        <p:nvPicPr>
+          <p:cNvPr id="6" name="Grafik 5" descr="Ein Bild, das Klebezettel, Farbigkeit, Diagramm enthält.&#10;&#10;KI-generierte Inhalte können fehlerhaft sein.">
+            <a:extLst>
+              <a:ext uri="{FF2B5EF4-FFF2-40B4-BE49-F238E27FC236}">
+                <a16:creationId xmlns:a16="http://schemas.microsoft.com/office/drawing/2014/main" id="{255ACED7-46DD-392A-59B2-6FCD2BC44717}"/>
+              </a:ext>
+            </a:extLst>
+          </p:cNvPr>
+          <p:cNvPicPr>
+            <a:picLocks noChangeAspect="1"/>
+          </p:cNvPicPr>
+          <p:nvPr/>
+        </p:nvPicPr>
+        <p:blipFill>
+          <a:blip r:embed="rId2"/>
+          <a:stretch>
+            <a:fillRect/>
+          </a:stretch>
+        </p:blipFill>
+        <p:spPr>
+          <a:xfrm>
+            <a:off x="2946081" y="2890916"/>
+            <a:ext cx="5745482" cy="1942590"/>
+          </a:xfrm>
+          <a:prstGeom prst="rect">
+            <a:avLst/>
+          </a:prstGeom>
+        </p:spPr>
+      </p:pic>
       <p:sp>
         <p:nvSpPr>
           <p:cNvPr id="2" name="Titel 1">
@@ -8795,22 +8825,20 @@
           <a:lstStyle/>
           <a:p>
             <a:r>
-              <a:rPr lang="en-US" b="1" dirty="0"/>
-              <a:t>Goal:</a:t>
-            </a:r>
-            <a:r>
               <a:rPr lang="en-US" dirty="0"/>
-              <a:t> Group Twitter users by their interest in Bitcoin (Trader, News, Bot, etc.)</a:t>
-            </a:r>
-          </a:p>
-          <a:p>
-            <a:r>
-              <a:rPr lang="en-US" b="1" dirty="0"/>
-              <a:t>Objective:</a:t>
-            </a:r>
+              <a:t>Cluster Twitter-users by Bitcoin interest (traders, news, bots, etc.)</a:t>
+            </a:r>
+          </a:p>
+          <a:p>
             <a:r>
               <a:rPr lang="en-US" dirty="0"/>
-              <a:t> Identify clusters where user sentiment might predict Bitcoin price movements</a:t>
+              <a:t>Find groups whose sentiment correlates with Bitcoin prices</a:t>
+            </a:r>
+          </a:p>
+          <a:p>
+            <a:r>
+              <a:rPr lang="en-US" dirty="0"/>
+              <a:t>Weight sentiments in the prediction based on cluster affiliation</a:t>
             </a:r>
           </a:p>
           <a:p>
@@ -8818,36 +8846,17 @@
           </a:p>
           <a:p>
             <a:r>
-              <a:rPr lang="en-US" b="1" dirty="0"/>
-              <a:t>Method:</a:t>
-            </a:r>
-            <a:r>
               <a:rPr lang="en-US" dirty="0"/>
-              <a:t> Cluster users based on their posts and profile descriptions</a:t>
-            </a:r>
-          </a:p>
-          <a:p>
-            <a:r>
-              <a:rPr lang="en-US" b="1" dirty="0"/>
-              <a:t>Interpretation:</a:t>
-            </a:r>
+              <a:t>Clustering based on posts and profile descriptions</a:t>
+            </a:r>
+          </a:p>
+          <a:p>
             <a:r>
               <a:rPr lang="en-US" dirty="0"/>
-              <a:t> Label clusters using ChatGPT for easy understanding</a:t>
-            </a:r>
-          </a:p>
-          <a:p>
-            <a:endParaRPr lang="en-GB" noProof="0" dirty="0"/>
-          </a:p>
-          <a:p>
-            <a:r>
-              <a:rPr lang="en-US" b="1" dirty="0"/>
-              <a:t>Prediction:</a:t>
-            </a:r>
-            <a:r>
-              <a:rPr lang="en-US" dirty="0"/>
-              <a:t> Weight user sentiments by their cluster affiliation</a:t>
-            </a:r>
+              <a:t>Labeling by ChatGPT</a:t>
+            </a:r>
+          </a:p>
+          <a:p>
             <a:endParaRPr lang="en-GB" noProof="0" dirty="0"/>
           </a:p>
         </p:txBody>
